--- a/docs/deck/SmartTraffic-5min.pptx
+++ b/docs/deck/SmartTraffic-5min.pptx
@@ -3183,6 +3183,18 @@
   <p:clrMapOvr>
     <a:masterClrMapping/>
   </p:clrMapOvr>
+  <mc:AlternateContent xmlns:mc="http://schemas.openxmlformats.org/markup-compatibility/2006">
+    <mc:Choice xmlns:p14="http://schemas.microsoft.com/office/powerpoint/2010/main" Requires="p14">
+      <p:transition spd="slow" p14:dur="700">
+        <p14:push dir="u"/>
+      </p:transition>
+    </mc:Choice>
+    <mc:Fallback>
+      <p:transition spd="slow">
+        <p:push dir="u"/>
+      </p:transition>
+    </mc:Fallback>
+  </mc:AlternateContent>
 </p:sld>
 </file>
 
@@ -3525,6 +3537,18 @@
   <p:clrMapOvr>
     <a:masterClrMapping/>
   </p:clrMapOvr>
+  <mc:AlternateContent xmlns:mc="http://schemas.openxmlformats.org/markup-compatibility/2006">
+    <mc:Choice xmlns:p14="http://schemas.microsoft.com/office/powerpoint/2010/main" Requires="p14">
+      <p:transition spd="slow" p14:dur="700">
+        <p14:fade/>
+      </p:transition>
+    </mc:Choice>
+    <mc:Fallback>
+      <p:transition spd="slow">
+        <p:fade/>
+      </p:transition>
+    </mc:Fallback>
+  </mc:AlternateContent>
 </p:sld>
 </file>
 
@@ -3804,6 +3828,18 @@
   <p:clrMapOvr>
     <a:masterClrMapping/>
   </p:clrMapOvr>
+  <mc:AlternateContent xmlns:mc="http://schemas.openxmlformats.org/markup-compatibility/2006">
+    <mc:Choice xmlns:p14="http://schemas.microsoft.com/office/powerpoint/2010/main" Requires="p14">
+      <p:transition spd="slow" p14:dur="700">
+        <p14:fade/>
+      </p:transition>
+    </mc:Choice>
+    <mc:Fallback>
+      <p:transition spd="slow">
+        <p:fade/>
+      </p:transition>
+    </mc:Fallback>
+  </mc:AlternateContent>
 </p:sld>
 </file>
 
@@ -4150,6 +4186,18 @@
   <p:clrMapOvr>
     <a:masterClrMapping/>
   </p:clrMapOvr>
+  <mc:AlternateContent xmlns:mc="http://schemas.openxmlformats.org/markup-compatibility/2006">
+    <mc:Choice xmlns:p14="http://schemas.microsoft.com/office/powerpoint/2010/main" Requires="p14">
+      <p:transition spd="slow" p14:dur="700">
+        <p14:fade/>
+      </p:transition>
+    </mc:Choice>
+    <mc:Fallback>
+      <p:transition spd="slow">
+        <p:fade/>
+      </p:transition>
+    </mc:Fallback>
+  </mc:AlternateContent>
 </p:sld>
 </file>
 
@@ -4326,6 +4374,18 @@
   <p:clrMapOvr>
     <a:masterClrMapping/>
   </p:clrMapOvr>
+  <mc:AlternateContent xmlns:mc="http://schemas.openxmlformats.org/markup-compatibility/2006">
+    <mc:Choice xmlns:p14="http://schemas.microsoft.com/office/powerpoint/2010/main" Requires="p14">
+      <p:transition spd="slow" p14:dur="700">
+        <p14:fade/>
+      </p:transition>
+    </mc:Choice>
+    <mc:Fallback>
+      <p:transition spd="slow">
+        <p:fade/>
+      </p:transition>
+    </mc:Fallback>
+  </mc:AlternateContent>
 </p:sld>
 </file>
 
@@ -4851,6 +4911,18 @@
   <p:clrMapOvr>
     <a:masterClrMapping/>
   </p:clrMapOvr>
+  <mc:AlternateContent xmlns:mc="http://schemas.openxmlformats.org/markup-compatibility/2006">
+    <mc:Choice xmlns:p14="http://schemas.microsoft.com/office/powerpoint/2010/main" Requires="p14">
+      <p:transition spd="slow" p14:dur="700">
+        <p14:fade/>
+      </p:transition>
+    </mc:Choice>
+    <mc:Fallback>
+      <p:transition spd="slow">
+        <p:fade/>
+      </p:transition>
+    </mc:Fallback>
+  </mc:AlternateContent>
 </p:sld>
 </file>
 
@@ -5117,6 +5189,18 @@
   <p:clrMapOvr>
     <a:masterClrMapping/>
   </p:clrMapOvr>
+  <mc:AlternateContent xmlns:mc="http://schemas.openxmlformats.org/markup-compatibility/2006">
+    <mc:Choice xmlns:p14="http://schemas.microsoft.com/office/powerpoint/2010/main" Requires="p14">
+      <p:transition spd="slow" p14:dur="700">
+        <p14:push dir="u"/>
+      </p:transition>
+    </mc:Choice>
+    <mc:Fallback>
+      <p:transition spd="slow">
+        <p:push dir="u"/>
+      </p:transition>
+    </mc:Fallback>
+  </mc:AlternateContent>
 </p:sld>
 </file>
 

--- a/docs/deck/SmartTraffic-5min.pptx
+++ b/docs/deck/SmartTraffic-5min.pptx
@@ -113,7 +113,7 @@
   <p:extLst>
     <p:ext uri="{521415D9-36F7-43E2-AB2F-B90AF26B5E84}">
       <p14:sectionLst xmlns:p14="http://schemas.microsoft.com/office/powerpoint/2010/main">
-        <p14:section name="Deck" id="{e7e61d42-661a-015c-3db8-3822732747e1}">
+        <p14:section name="Deck" id="{b09bff88-0893-e6d2-1f78-94a9157ea9a3}">
           <p14:sldIdLst>
             <p14:sldId id="256"/>
             <p14:sldId id="257"/>
@@ -2326,7 +2326,7 @@
                   <a:srgbClr val="94A7B8"/>
                 </a:solidFill>
               </a:rPr>
-              <a:t>SmartTraffic · SIH PS90</a:t>
+              <a:t>SmartTraffic · Design of Smart Cities</a:t>
             </a:r>
             <a:endParaRPr lang="en-US" sz="1000" dirty="0"/>
           </a:p>
@@ -2478,7 +2478,7 @@
                   <a:srgbClr val="94A7B8"/>
                 </a:solidFill>
               </a:rPr>
-              <a:t>SmartTraffic · SIH PS90</a:t>
+              <a:t>SmartTraffic · Design of Smart Cities</a:t>
             </a:r>
             <a:endParaRPr lang="en-US" sz="1000" dirty="0"/>
           </a:p>
@@ -2949,7 +2949,7 @@
                   <a:srgbClr val="94A7B8"/>
                 </a:solidFill>
               </a:rPr>
-              <a:t>Adaptive signal control built for lane-less Indian traffic   ·   SIH PS90</a:t>
+              <a:t>Adaptive signal control built for lane-less Indian traffic   ·   Design of Smart Cities</a:t>
             </a:r>
             <a:endParaRPr lang="en-US" sz="1800" dirty="0"/>
           </a:p>

--- a/docs/deck/SmartTraffic-5min.pptx
+++ b/docs/deck/SmartTraffic-5min.pptx
@@ -113,7 +113,7 @@
   <p:extLst>
     <p:ext uri="{521415D9-36F7-43E2-AB2F-B90AF26B5E84}">
       <p14:sectionLst xmlns:p14="http://schemas.microsoft.com/office/powerpoint/2010/main">
-        <p14:section name="Deck" id="{b09bff88-0893-e6d2-1f78-94a9157ea9a3}">
+        <p14:section name="Deck" id="{97958c77-10bd-d94f-fccd-4c024ef6b907}">
           <p14:sldIdLst>
             <p14:sldId id="256"/>
             <p14:sldId id="257"/>
@@ -196,7 +196,7 @@
           </c:spPr>
           <c:invertIfNegative val="0"/>
           <c:dLbls>
-            <c:numFmt formatCode="#,##0" sourceLinked="0"/>
+            <c:numFmt formatCode="0.00" sourceLinked="0"/>
             <c:txPr>
               <a:bodyPr/>
               <a:lstStyle/>
@@ -285,7 +285,7 @@
           </c:spPr>
           <c:invertIfNegative val="0"/>
           <c:dLbls>
-            <c:numFmt formatCode="#,##0" sourceLinked="0"/>
+            <c:numFmt formatCode="0.00" sourceLinked="0"/>
             <c:txPr>
               <a:bodyPr/>
               <a:lstStyle/>
@@ -353,7 +353,7 @@
           </c:val>
         </c:ser>
         <c:dLbls>
-          <c:numFmt formatCode="#,##0" sourceLinked="0"/>
+          <c:numFmt formatCode="0.00" sourceLinked="0"/>
           <c:txPr>
             <a:bodyPr/>
             <a:lstStyle/>
@@ -428,6 +428,7 @@
         <c:scaling>
           <c:orientation val="minMax"/>
           <c:max val="3.2"/>
+          <c:min val="0"/>
         </c:scaling>
         <c:delete val="0"/>
         <c:axPos val="l"/>
@@ -753,6 +754,7 @@
         <c:scaling>
           <c:orientation val="minMax"/>
           <c:max val="46000"/>
+          <c:min val="0"/>
         </c:scaling>
         <c:delete val="0"/>
         <c:axPos val="l"/>
@@ -1058,6 +1060,7 @@
         <c:scaling>
           <c:orientation val="minMax"/>
           <c:max val="215"/>
+          <c:min val="0"/>
         </c:scaling>
         <c:delete val="0"/>
         <c:axPos val="l"/>
@@ -2169,7 +2172,7 @@
         <p:txBody>
           <a:bodyPr wrap="square" rtlCol="0"/>
           <a:lstStyle>
-            <a:lvl1pPr indent="0" marL="0">
+            <a:lvl1pPr algn="l" indent="0" marL="0">
               <a:buNone/>
               <a:defRPr lang="en-US" sz="4600" b="1" dirty="0">
                 <a:solidFill>
@@ -2179,7 +2182,7 @@
             </a:lvl1pPr>
           </a:lstStyle>
           <a:p>
-            <a:pPr indent="0" marL="0">
+            <a:pPr algn="l" indent="0" marL="0">
               <a:buNone/>
             </a:pPr>
             <a:endParaRPr lang="en-US" sz="4600" dirty="0"/>
@@ -2279,7 +2282,7 @@
         <p:txBody>
           <a:bodyPr wrap="square" rtlCol="0"/>
           <a:lstStyle>
-            <a:lvl1pPr indent="0" marL="0">
+            <a:lvl1pPr algn="l" indent="0" marL="0">
               <a:buNone/>
               <a:defRPr lang="en-US" sz="3600" b="1" dirty="0">
                 <a:solidFill>
@@ -2289,7 +2292,7 @@
             </a:lvl1pPr>
           </a:lstStyle>
           <a:p>
-            <a:pPr indent="0" marL="0">
+            <a:pPr algn="l" indent="0" marL="0">
               <a:buNone/>
             </a:pPr>
             <a:endParaRPr lang="en-US" sz="3600" dirty="0"/>
@@ -2431,7 +2434,7 @@
         <p:txBody>
           <a:bodyPr wrap="square" rtlCol="0"/>
           <a:lstStyle>
-            <a:lvl1pPr indent="0" marL="0">
+            <a:lvl1pPr algn="l" indent="0" marL="0">
               <a:buNone/>
               <a:defRPr lang="en-US" sz="3600" b="1" dirty="0">
                 <a:solidFill>
@@ -2441,7 +2444,7 @@
             </a:lvl1pPr>
           </a:lstStyle>
           <a:p>
-            <a:pPr indent="0" marL="0">
+            <a:pPr algn="l" indent="0" marL="0">
               <a:buNone/>
             </a:pPr>
             <a:endParaRPr lang="en-US" sz="3600" dirty="0"/>
@@ -2902,7 +2905,7 @@
           <a:bodyPr wrap="square" rtlCol="0"/>
           <a:lstStyle/>
           <a:p>
-            <a:pPr indent="0" marL="0">
+            <a:pPr algn="l" indent="0" marL="0">
               <a:buNone/>
             </a:pPr>
             <a:r>
@@ -3238,7 +3241,7 @@
           <a:bodyPr wrap="square" rtlCol="0"/>
           <a:lstStyle/>
           <a:p>
-            <a:pPr indent="0" marL="0">
+            <a:pPr algn="l" indent="0" marL="0">
               <a:buNone/>
             </a:pPr>
             <a:r>
@@ -3592,7 +3595,7 @@
           <a:bodyPr wrap="square" rtlCol="0"/>
           <a:lstStyle/>
           <a:p>
-            <a:pPr indent="0" marL="0">
+            <a:pPr algn="l" indent="0" marL="0">
               <a:buNone/>
             </a:pPr>
             <a:r>
@@ -3730,8 +3733,8 @@
         </p:nvSpPr>
         <p:spPr>
           <a:xfrm>
-            <a:off x="7863840" y="3200400"/>
-            <a:ext cx="3383280" cy="2011680"/>
+            <a:off x="7863840" y="2971800"/>
+            <a:ext cx="3383280" cy="2194560"/>
           </a:xfrm>
           <a:prstGeom prst="rect">
             <a:avLst/>
@@ -3883,7 +3886,7 @@
           <a:bodyPr wrap="square" rtlCol="0"/>
           <a:lstStyle/>
           <a:p>
-            <a:pPr indent="0" marL="0">
+            <a:pPr algn="l" indent="0" marL="0">
               <a:buNone/>
             </a:pPr>
             <a:r>
@@ -3969,8 +3972,8 @@
         </p:nvSpPr>
         <p:spPr>
           <a:xfrm>
-            <a:off x="960120" y="2514600"/>
-            <a:ext cx="4572000" cy="2743200"/>
+            <a:off x="960120" y="2240280"/>
+            <a:ext cx="4572000" cy="2926080"/>
           </a:xfrm>
           <a:prstGeom prst="rect">
             <a:avLst/>
@@ -4088,8 +4091,8 @@
         </p:nvSpPr>
         <p:spPr>
           <a:xfrm>
-            <a:off x="6629400" y="2514600"/>
-            <a:ext cx="4572000" cy="2743200"/>
+            <a:off x="6629400" y="2240280"/>
+            <a:ext cx="4572000" cy="2926080"/>
           </a:xfrm>
           <a:prstGeom prst="rect">
             <a:avLst/>
@@ -4241,7 +4244,7 @@
           <a:bodyPr wrap="square" rtlCol="0"/>
           <a:lstStyle/>
           <a:p>
-            <a:pPr indent="0" marL="0">
+            <a:pPr algn="l" indent="0" marL="0">
               <a:buNone/>
             </a:pPr>
             <a:r>
@@ -4429,7 +4432,7 @@
           <a:bodyPr wrap="square" rtlCol="0"/>
           <a:lstStyle/>
           <a:p>
-            <a:pPr indent="0" marL="0">
+            <a:pPr algn="l" indent="0" marL="0">
               <a:buNone/>
             </a:pPr>
             <a:r>
@@ -4966,7 +4969,7 @@
           <a:bodyPr wrap="square" rtlCol="0"/>
           <a:lstStyle/>
           <a:p>
-            <a:pPr indent="0" marL="0">
+            <a:pPr algn="l" indent="0" marL="0">
               <a:buNone/>
             </a:pPr>
             <a:r>

--- a/docs/deck/SmartTraffic-5min.pptx
+++ b/docs/deck/SmartTraffic-5min.pptx
@@ -113,7 +113,7 @@
   <p:extLst>
     <p:ext uri="{521415D9-36F7-43E2-AB2F-B90AF26B5E84}">
       <p14:sectionLst xmlns:p14="http://schemas.microsoft.com/office/powerpoint/2010/main">
-        <p14:section name="Deck" id="{97958c77-10bd-d94f-fccd-4c024ef6b907}">
+        <p14:section name="Deck" id="{790e9daf-7150-ad02-ac18-6fd701d0d273}">
           <p14:sldIdLst>
             <p14:sldId id="256"/>
             <p14:sldId id="257"/>
@@ -147,7 +147,7 @@
             <a:pPr>
               <a:defRPr sz="1300" b="0" i="0" u="none" strike="noStrike">
                 <a:solidFill>
-                  <a:srgbClr val="44525F"/>
+                  <a:srgbClr val="57534B"/>
                 </a:solidFill>
                 <a:latin typeface="+mn-lt"/>
               </a:defRPr>
@@ -155,7 +155,7 @@
             <a:r>
               <a:rPr sz="1300" b="0" i="0" u="none" strike="noStrike">
                 <a:solidFill>
-                  <a:srgbClr val="44525F"/>
+                  <a:srgbClr val="57534B"/>
                 </a:solidFill>
                 <a:latin typeface="+mn-lt"/>
               </a:rPr>
@@ -190,7 +190,7 @@
           </c:tx>
           <c:spPr>
             <a:solidFill>
-              <a:srgbClr val="94A7B8"/>
+              <a:srgbClr val="8C887F"/>
             </a:solidFill>
             <a:effectLst/>
           </c:spPr>
@@ -204,7 +204,7 @@
                 <a:pPr>
                   <a:defRPr b="0" i="0" strike="noStrike" sz="1100" u="none">
                     <a:solidFill>
-                      <a:srgbClr val="44525F"/>
+                      <a:srgbClr val="57534B"/>
                     </a:solidFill>
                     <a:latin typeface="+mn-lt"/>
                   </a:defRPr>
@@ -279,7 +279,7 @@
           </c:tx>
           <c:spPr>
             <a:solidFill>
-              <a:srgbClr val="FFB347"/>
+              <a:srgbClr val="E8A33D"/>
             </a:solidFill>
             <a:effectLst/>
           </c:spPr>
@@ -293,7 +293,7 @@
                 <a:pPr>
                   <a:defRPr b="0" i="0" strike="noStrike" sz="1100" u="none">
                     <a:solidFill>
-                      <a:srgbClr val="44525F"/>
+                      <a:srgbClr val="57534B"/>
                     </a:solidFill>
                     <a:latin typeface="+mn-lt"/>
                   </a:defRPr>
@@ -361,7 +361,7 @@
               <a:pPr>
                 <a:defRPr b="0" i="0" strike="noStrike" sz="1100" u="none">
                   <a:solidFill>
-                    <a:srgbClr val="44525F"/>
+                    <a:srgbClr val="57534B"/>
                   </a:solidFill>
                   <a:latin typeface="+mn-lt"/>
                 </a:defRPr>
@@ -409,7 +409,7 @@
             <a:pPr>
               <a:defRPr sz="1100" b="0" i="0" u="none" strike="noStrike">
                 <a:solidFill>
-                  <a:srgbClr val="94A7B8"/>
+                  <a:srgbClr val="8C887F"/>
                 </a:solidFill>
                 <a:latin typeface="+mn-lt"/>
               </a:defRPr>
@@ -436,7 +436,7 @@
           <c:spPr>
             <a:ln w="12700" cap="flat">
               <a:solidFill>
-                <a:srgbClr val="DCE4EB"/>
+                <a:srgbClr val="D6D1C7"/>
               </a:solidFill>
               <a:prstDash val="solid"/>
               <a:round/>
@@ -463,7 +463,7 @@
             <a:pPr>
               <a:defRPr sz="1100" b="0" i="0" u="none" strike="noStrike">
                 <a:solidFill>
-                  <a:srgbClr val="94A7B8"/>
+                  <a:srgbClr val="8C887F"/>
                 </a:solidFill>
                 <a:latin typeface="+mn-lt"/>
               </a:defRPr>
@@ -493,7 +493,7 @@
           <a:pPr>
             <a:defRPr sz="1100">
               <a:solidFill>
-                <a:srgbClr val="44525F"/>
+                <a:srgbClr val="57534B"/>
               </a:solidFill>
               <a:latin typeface="+mn-lt"/>
               <a:cs typeface="+mn-lt"/>
@@ -533,7 +533,7 @@
             <a:pPr>
               <a:defRPr sz="1300" b="0" i="0" u="none" strike="noStrike">
                 <a:solidFill>
-                  <a:srgbClr val="44525F"/>
+                  <a:srgbClr val="57534B"/>
                 </a:solidFill>
                 <a:latin typeface="+mn-lt"/>
               </a:defRPr>
@@ -541,7 +541,7 @@
             <a:r>
               <a:rPr sz="1300" b="0" i="0" u="none" strike="noStrike">
                 <a:solidFill>
-                  <a:srgbClr val="44525F"/>
+                  <a:srgbClr val="57534B"/>
                 </a:solidFill>
                 <a:latin typeface="+mn-lt"/>
               </a:rPr>
@@ -576,7 +576,7 @@
           </c:tx>
           <c:spPr>
             <a:solidFill>
-              <a:srgbClr val="94A7B8"/>
+              <a:srgbClr val="8C887F"/>
             </a:solidFill>
             <a:effectLst/>
           </c:spPr>
@@ -590,7 +590,7 @@
                 <a:pPr>
                   <a:defRPr b="0" i="0" strike="noStrike" sz="1100" u="none">
                     <a:solidFill>
-                      <a:srgbClr val="44525F"/>
+                      <a:srgbClr val="57534B"/>
                     </a:solidFill>
                     <a:latin typeface="+mn-lt"/>
                   </a:defRPr>
@@ -611,7 +611,7 @@
             <c:bubble3D val="0"/>
             <c:spPr>
               <a:solidFill>
-                <a:srgbClr val="94A7B8"/>
+                <a:srgbClr val="8C887F"/>
               </a:solidFill>
               <a:effectLst/>
             </c:spPr>
@@ -622,7 +622,7 @@
             <c:bubble3D val="0"/>
             <c:spPr>
               <a:solidFill>
-                <a:srgbClr val="FF5A5A"/>
+                <a:srgbClr val="C8503F"/>
               </a:solidFill>
               <a:effectLst/>
             </c:spPr>
@@ -633,7 +633,7 @@
             <c:bubble3D val="0"/>
             <c:spPr>
               <a:solidFill>
-                <a:srgbClr val="3CE87C"/>
+                <a:srgbClr val="6AA84F"/>
               </a:solidFill>
               <a:effectLst/>
             </c:spPr>
@@ -687,7 +687,7 @@
               <a:pPr>
                 <a:defRPr b="0" i="0" strike="noStrike" sz="1100" u="none">
                   <a:solidFill>
-                    <a:srgbClr val="44525F"/>
+                    <a:srgbClr val="57534B"/>
                   </a:solidFill>
                   <a:latin typeface="+mn-lt"/>
                 </a:defRPr>
@@ -735,7 +735,7 @@
             <a:pPr>
               <a:defRPr sz="1100" b="0" i="0" u="none" strike="noStrike">
                 <a:solidFill>
-                  <a:srgbClr val="94A7B8"/>
+                  <a:srgbClr val="8C887F"/>
                 </a:solidFill>
                 <a:latin typeface="+mn-lt"/>
               </a:defRPr>
@@ -762,7 +762,7 @@
           <c:spPr>
             <a:ln w="12700" cap="flat">
               <a:solidFill>
-                <a:srgbClr val="DCE4EB"/>
+                <a:srgbClr val="D6D1C7"/>
               </a:solidFill>
               <a:prstDash val="solid"/>
               <a:round/>
@@ -789,7 +789,7 @@
             <a:pPr>
               <a:defRPr sz="1100" b="0" i="0" u="none" strike="noStrike">
                 <a:solidFill>
-                  <a:srgbClr val="94A7B8"/>
+                  <a:srgbClr val="8C887F"/>
                 </a:solidFill>
                 <a:latin typeface="+mn-lt"/>
               </a:defRPr>
@@ -839,7 +839,7 @@
             <a:pPr>
               <a:defRPr sz="1300" b="0" i="0" u="none" strike="noStrike">
                 <a:solidFill>
-                  <a:srgbClr val="44525F"/>
+                  <a:srgbClr val="57534B"/>
                 </a:solidFill>
                 <a:latin typeface="+mn-lt"/>
               </a:defRPr>
@@ -847,7 +847,7 @@
             <a:r>
               <a:rPr sz="1300" b="0" i="0" u="none" strike="noStrike">
                 <a:solidFill>
-                  <a:srgbClr val="44525F"/>
+                  <a:srgbClr val="57534B"/>
                 </a:solidFill>
                 <a:latin typeface="+mn-lt"/>
               </a:rPr>
@@ -882,7 +882,7 @@
           </c:tx>
           <c:spPr>
             <a:solidFill>
-              <a:srgbClr val="94A7B8"/>
+              <a:srgbClr val="8C887F"/>
             </a:solidFill>
             <a:effectLst/>
           </c:spPr>
@@ -896,7 +896,7 @@
                 <a:pPr>
                   <a:defRPr b="0" i="0" strike="noStrike" sz="1100" u="none">
                     <a:solidFill>
-                      <a:srgbClr val="44525F"/>
+                      <a:srgbClr val="57534B"/>
                     </a:solidFill>
                     <a:latin typeface="+mn-lt"/>
                   </a:defRPr>
@@ -917,7 +917,7 @@
             <c:bubble3D val="0"/>
             <c:spPr>
               <a:solidFill>
-                <a:srgbClr val="94A7B8"/>
+                <a:srgbClr val="8C887F"/>
               </a:solidFill>
               <a:effectLst/>
             </c:spPr>
@@ -928,7 +928,7 @@
             <c:bubble3D val="0"/>
             <c:spPr>
               <a:solidFill>
-                <a:srgbClr val="FF5A5A"/>
+                <a:srgbClr val="C8503F"/>
               </a:solidFill>
               <a:effectLst/>
             </c:spPr>
@@ -939,7 +939,7 @@
             <c:bubble3D val="0"/>
             <c:spPr>
               <a:solidFill>
-                <a:srgbClr val="3CE87C"/>
+                <a:srgbClr val="6AA84F"/>
               </a:solidFill>
               <a:effectLst/>
             </c:spPr>
@@ -993,7 +993,7 @@
               <a:pPr>
                 <a:defRPr b="0" i="0" strike="noStrike" sz="1100" u="none">
                   <a:solidFill>
-                    <a:srgbClr val="44525F"/>
+                    <a:srgbClr val="57534B"/>
                   </a:solidFill>
                   <a:latin typeface="+mn-lt"/>
                 </a:defRPr>
@@ -1041,7 +1041,7 @@
             <a:pPr>
               <a:defRPr sz="1100" b="0" i="0" u="none" strike="noStrike">
                 <a:solidFill>
-                  <a:srgbClr val="94A7B8"/>
+                  <a:srgbClr val="8C887F"/>
                 </a:solidFill>
                 <a:latin typeface="+mn-lt"/>
               </a:defRPr>
@@ -1068,7 +1068,7 @@
           <c:spPr>
             <a:ln w="12700" cap="flat">
               <a:solidFill>
-                <a:srgbClr val="DCE4EB"/>
+                <a:srgbClr val="D6D1C7"/>
               </a:solidFill>
               <a:prstDash val="solid"/>
               <a:round/>
@@ -1095,7 +1095,7 @@
             <a:pPr>
               <a:defRPr sz="1100" b="0" i="0" u="none" strike="noStrike">
                 <a:solidFill>
-                  <a:srgbClr val="94A7B8"/>
+                  <a:srgbClr val="8C887F"/>
                 </a:solidFill>
                 <a:latin typeface="+mn-lt"/>
               </a:defRPr>
@@ -2132,7 +2132,7 @@
     <p:bg>
       <p:bgPr>
         <a:solidFill>
-          <a:srgbClr val="0E1620"/>
+          <a:srgbClr val="16161A"/>
         </a:solidFill>
       </p:bgPr>
     </p:bg>
@@ -2215,7 +2215,7 @@
               <a:buNone/>
               <a:defRPr lang="en-US" sz="1800" dirty="0">
                 <a:solidFill>
-                  <a:srgbClr val="94A7B8"/>
+                  <a:srgbClr val="8C887F"/>
                 </a:solidFill>
               </a:defRPr>
             </a:lvl1pPr>
@@ -2326,7 +2326,7 @@
             <a:r>
               <a:rPr lang="en-US" sz="1000" dirty="0">
                 <a:solidFill>
-                  <a:srgbClr val="94A7B8"/>
+                  <a:srgbClr val="8C887F"/>
                 </a:solidFill>
               </a:rPr>
               <a:t>SmartTraffic · Design of Smart Cities</a:t>
@@ -2365,7 +2365,7 @@
             <a:lvl1pPr>
               <a:defRPr sz="1000">
                 <a:solidFill>
-                  <a:srgbClr val="94A7B8"/>
+                  <a:srgbClr val="8C887F"/>
                 </a:solidFill>
               </a:defRPr>
             </a:lvl1pPr>
@@ -2394,7 +2394,7 @@
     <p:bg>
       <p:bgPr>
         <a:solidFill>
-          <a:srgbClr val="0E1620"/>
+          <a:srgbClr val="16161A"/>
         </a:solidFill>
       </p:bgPr>
     </p:bg>
@@ -2478,7 +2478,7 @@
             <a:r>
               <a:rPr lang="en-US" sz="1000" dirty="0">
                 <a:solidFill>
-                  <a:srgbClr val="94A7B8"/>
+                  <a:srgbClr val="8C887F"/>
                 </a:solidFill>
               </a:rPr>
               <a:t>SmartTraffic · Design of Smart Cities</a:t>
@@ -2517,7 +2517,7 @@
             <a:lvl1pPr>
               <a:defRPr sz="1000">
                 <a:solidFill>
-                  <a:srgbClr val="94A7B8"/>
+                  <a:srgbClr val="8C887F"/>
                 </a:solidFill>
               </a:defRPr>
             </a:lvl1pPr>
@@ -2587,7 +2587,7 @@
             <a:lvl1pPr>
               <a:defRPr sz="1000">
                 <a:solidFill>
-                  <a:srgbClr val="94A7B8"/>
+                  <a:srgbClr val="8C887F"/>
                 </a:solidFill>
               </a:defRPr>
             </a:lvl1pPr>
@@ -2949,7 +2949,7 @@
             <a:r>
               <a:rPr lang="en-US" sz="1800" dirty="0">
                 <a:solidFill>
-                  <a:srgbClr val="94A7B8"/>
+                  <a:srgbClr val="8C887F"/>
                 </a:solidFill>
               </a:rPr>
               <a:t>Adaptive signal control built for lane-less Indian traffic   ·   Design of Smart Cities</a:t>
@@ -2971,15 +2971,15 @@
           </a:xfrm>
           <a:prstGeom prst="roundRect">
             <a:avLst>
-              <a:gd name="adj" fmla="val 5926"/>
+              <a:gd name="adj" fmla="val 1481"/>
             </a:avLst>
           </a:prstGeom>
           <a:solidFill>
-            <a:srgbClr val="1B2A3A"/>
+            <a:srgbClr val="21222A"/>
           </a:solidFill>
           <a:ln w="12700">
             <a:solidFill>
-              <a:srgbClr val="1B2A3A"/>
+              <a:srgbClr val="21222A"/>
             </a:solidFill>
             <a:prstDash val="solid"/>
           </a:ln>
@@ -3023,7 +3023,7 @@
             <a:r>
               <a:rPr lang="en-US" sz="1600" dirty="0">
                 <a:solidFill>
-                  <a:srgbClr val="FFB347"/>
+                  <a:srgbClr val="E8A33D"/>
                 </a:solidFill>
               </a:rPr>
               <a:t>   24BCE5296</a:t>
@@ -3070,7 +3070,7 @@
             <a:r>
               <a:rPr lang="en-US" sz="1600" dirty="0">
                 <a:solidFill>
-                  <a:srgbClr val="FFB347"/>
+                  <a:srgbClr val="E8A33D"/>
                 </a:solidFill>
               </a:rPr>
               <a:t>   24BCE5255</a:t>
@@ -3092,11 +3092,11 @@
           </a:xfrm>
           <a:prstGeom prst="roundRect">
             <a:avLst>
-              <a:gd name="adj" fmla="val 7813"/>
+              <a:gd name="adj" fmla="val 2604"/>
             </a:avLst>
           </a:prstGeom>
           <a:solidFill>
-            <a:srgbClr val="09111A"/>
+            <a:srgbClr val="111115"/>
           </a:solidFill>
           <a:ln w="12700">
             <a:solidFill>
@@ -3121,11 +3121,11 @@
             <a:avLst/>
           </a:prstGeom>
           <a:solidFill>
-            <a:srgbClr val="1B2730"/>
+            <a:srgbClr val="26262C"/>
           </a:solidFill>
           <a:ln w="12700">
             <a:solidFill>
-              <a:srgbClr val="22303C"/>
+              <a:srgbClr val="2E2E34"/>
             </a:solidFill>
             <a:prstDash val="solid"/>
           </a:ln>
@@ -3146,11 +3146,11 @@
             <a:avLst/>
           </a:prstGeom>
           <a:solidFill>
-            <a:srgbClr val="1B2730"/>
+            <a:srgbClr val="26262C"/>
           </a:solidFill>
           <a:ln w="12700">
             <a:solidFill>
-              <a:srgbClr val="22303C"/>
+              <a:srgbClr val="2E2E34"/>
             </a:solidFill>
             <a:prstDash val="solid"/>
           </a:ln>
@@ -3171,11 +3171,11 @@
             <a:avLst/>
           </a:prstGeom>
           <a:solidFill>
-            <a:srgbClr val="3CE87C"/>
+            <a:srgbClr val="6AA84F"/>
           </a:solidFill>
           <a:ln w="12700">
             <a:solidFill>
-              <a:srgbClr val="3CE87C"/>
+              <a:srgbClr val="6AA84F"/>
             </a:solidFill>
             <a:prstDash val="solid"/>
           </a:ln>
@@ -3269,15 +3269,15 @@
           </a:xfrm>
           <a:prstGeom prst="roundRect">
             <a:avLst>
-              <a:gd name="adj" fmla="val 2051"/>
+              <a:gd name="adj" fmla="val 513"/>
             </a:avLst>
           </a:prstGeom>
           <a:solidFill>
-            <a:srgbClr val="1B2A3A"/>
+            <a:srgbClr val="21222A"/>
           </a:solidFill>
           <a:ln w="12700">
             <a:solidFill>
-              <a:srgbClr val="1B2A3A"/>
+              <a:srgbClr val="21222A"/>
             </a:solidFill>
             <a:prstDash val="solid"/>
           </a:ln>
@@ -3310,7 +3310,7 @@
             <a:r>
               <a:rPr lang="en-US" sz="1700" b="1" dirty="0">
                 <a:solidFill>
-                  <a:srgbClr val="94A7B8"/>
+                  <a:srgbClr val="8C887F"/>
                 </a:solidFill>
               </a:rPr>
               <a:t>What the textbooks assume</a:t>
@@ -3368,15 +3368,15 @@
           </a:xfrm>
           <a:prstGeom prst="roundRect">
             <a:avLst>
-              <a:gd name="adj" fmla="val 2051"/>
+              <a:gd name="adj" fmla="val 513"/>
             </a:avLst>
           </a:prstGeom>
           <a:solidFill>
-            <a:srgbClr val="2A2015"/>
+            <a:srgbClr val="2A2114"/>
           </a:solidFill>
           <a:ln w="12700">
             <a:solidFill>
-              <a:srgbClr val="2A2015"/>
+              <a:srgbClr val="2A2114"/>
             </a:solidFill>
             <a:prstDash val="solid"/>
           </a:ln>
@@ -3409,7 +3409,7 @@
             <a:r>
               <a:rPr lang="en-US" sz="1700" b="1" dirty="0">
                 <a:solidFill>
-                  <a:srgbClr val="FFB347"/>
+                  <a:srgbClr val="E8A33D"/>
                 </a:solidFill>
               </a:rPr>
               <a:t>What an Indian junction does</a:t>
@@ -3481,7 +3481,7 @@
             <a:r>
               <a:rPr lang="en-US" sz="1300" i="1" dirty="0">
                 <a:solidFill>
-                  <a:srgbClr val="94A7B8"/>
+                  <a:srgbClr val="8C887F"/>
                 </a:solidFill>
               </a:rPr>
               <a:t>Chennai: 132 hours lost per driver per year, 16 km/h at peak  ·  TomTom 2025</a:t>
@@ -3520,7 +3520,7 @@
             <a:lvl1pPr>
               <a:defRPr sz="1000">
                 <a:solidFill>
-                  <a:srgbClr val="94A7B8"/>
+                  <a:srgbClr val="8C887F"/>
                 </a:solidFill>
               </a:defRPr>
             </a:lvl1pPr>
@@ -3639,15 +3639,15 @@
           </a:xfrm>
           <a:prstGeom prst="roundRect">
             <a:avLst>
-              <a:gd name="adj" fmla="val 1860"/>
+              <a:gd name="adj" fmla="val 465"/>
             </a:avLst>
           </a:prstGeom>
           <a:solidFill>
-            <a:srgbClr val="EEF3F7"/>
+            <a:srgbClr val="E4E0D8"/>
           </a:solidFill>
           <a:ln w="12700">
             <a:solidFill>
-              <a:srgbClr val="EEF3F7"/>
+              <a:srgbClr val="E4E0D8"/>
             </a:solidFill>
             <a:prstDash val="solid"/>
           </a:ln>
@@ -3680,7 +3680,7 @@
             <a:r>
               <a:rPr lang="en-US" sz="5000" b="1" dirty="0">
                 <a:solidFill>
-                  <a:srgbClr val="FF5A5A"/>
+                  <a:srgbClr val="C8503F"/>
                 </a:solidFill>
               </a:rPr>
               <a:t>21.5%</a:t>
@@ -3811,7 +3811,7 @@
             <a:lvl1pPr>
               <a:defRPr sz="1000">
                 <a:solidFill>
-                  <a:srgbClr val="94A7B8"/>
+                  <a:srgbClr val="8C887F"/>
                 </a:solidFill>
               </a:defRPr>
             </a:lvl1pPr>
@@ -3914,15 +3914,15 @@
           </a:xfrm>
           <a:prstGeom prst="roundRect">
             <a:avLst>
-              <a:gd name="adj" fmla="val 1860"/>
+              <a:gd name="adj" fmla="val 465"/>
             </a:avLst>
           </a:prstGeom>
           <a:solidFill>
-            <a:srgbClr val="2A1518"/>
+            <a:srgbClr val="2B1A17"/>
           </a:solidFill>
           <a:ln w="12700">
             <a:solidFill>
-              <a:srgbClr val="2A1518"/>
+              <a:srgbClr val="2B1A17"/>
             </a:solidFill>
             <a:prstDash val="solid"/>
           </a:ln>
@@ -3955,7 +3955,7 @@
             <a:r>
               <a:rPr lang="en-US" sz="1700" b="1" dirty="0">
                 <a:solidFill>
-                  <a:srgbClr val="FF5A5A"/>
+                  <a:srgbClr val="C8503F"/>
                 </a:solidFill>
               </a:rPr>
               <a:t>Correcting the measure was not enough</a:t>
@@ -4033,15 +4033,15 @@
           </a:xfrm>
           <a:prstGeom prst="roundRect">
             <a:avLst>
-              <a:gd name="adj" fmla="val 1860"/>
+              <a:gd name="adj" fmla="val 465"/>
             </a:avLst>
           </a:prstGeom>
           <a:solidFill>
-            <a:srgbClr val="13301F"/>
+            <a:srgbClr val="1C2418"/>
           </a:solidFill>
           <a:ln w="12700">
             <a:solidFill>
-              <a:srgbClr val="13301F"/>
+              <a:srgbClr val="1C2418"/>
             </a:solidFill>
             <a:prstDash val="solid"/>
           </a:ln>
@@ -4074,7 +4074,7 @@
             <a:r>
               <a:rPr lang="en-US" sz="1700" b="1" dirty="0">
                 <a:solidFill>
-                  <a:srgbClr val="3CE87C"/>
+                  <a:srgbClr val="6AA84F"/>
                 </a:solidFill>
               </a:rPr>
               <a:t>So we changed what we optimise</a:t>
@@ -4169,7 +4169,7 @@
             <a:lvl1pPr>
               <a:defRPr sz="1000">
                 <a:solidFill>
-                  <a:srgbClr val="94A7B8"/>
+                  <a:srgbClr val="8C887F"/>
                 </a:solidFill>
               </a:defRPr>
             </a:lvl1pPr>
@@ -4357,7 +4357,7 @@
             <a:lvl1pPr>
               <a:defRPr sz="1000">
                 <a:solidFill>
-                  <a:srgbClr val="94A7B8"/>
+                  <a:srgbClr val="8C887F"/>
                 </a:solidFill>
               </a:defRPr>
             </a:lvl1pPr>
@@ -4460,15 +4460,15 @@
           </a:xfrm>
           <a:prstGeom prst="roundRect">
             <a:avLst>
-              <a:gd name="adj" fmla="val 5926"/>
+              <a:gd name="adj" fmla="val 1481"/>
             </a:avLst>
           </a:prstGeom>
           <a:solidFill>
-            <a:srgbClr val="0E1620"/>
+            <a:srgbClr val="16161A"/>
           </a:solidFill>
           <a:ln w="12700">
             <a:solidFill>
-              <a:srgbClr val="0E1620"/>
+              <a:srgbClr val="16161A"/>
             </a:solidFill>
             <a:prstDash val="solid"/>
           </a:ln>
@@ -4501,11 +4501,11 @@
             <a:r>
               <a:rPr lang="en-US" sz="2000" b="1" dirty="0">
                 <a:solidFill>
-                  <a:srgbClr val="3CE87C"/>
-                </a:solidFill>
-                <a:latin typeface="Courier New" pitchFamily="34" charset="0"/>
-                <a:ea typeface="Courier New" pitchFamily="34" charset="-122"/>
-                <a:cs typeface="Courier New" pitchFamily="34" charset="-120"/>
+                  <a:srgbClr val="6AA84F"/>
+                </a:solidFill>
+                <a:latin typeface="Consolas" pitchFamily="34" charset="0"/>
+                <a:ea typeface="Consolas" pitchFamily="34" charset="-122"/>
+                <a:cs typeface="Consolas" pitchFamily="34" charset="-120"/>
               </a:rPr>
               <a:t>python scripts/reproduce_results.py</a:t>
             </a:r>
@@ -4540,7 +4540,7 @@
             <a:r>
               <a:rPr lang="en-US" sz="1400" dirty="0">
                 <a:solidFill>
-                  <a:srgbClr val="94A7B8"/>
+                  <a:srgbClr val="8C887F"/>
                 </a:solidFill>
               </a:rPr>
               <a:t>Re-measures every documented claim and exits non-zero if one has stopped being true.</a:t>
@@ -4576,7 +4576,7 @@
             <a:r>
               <a:rPr lang="en-US" sz="4400" b="1" dirty="0">
                 <a:solidFill>
-                  <a:srgbClr val="3CE87C"/>
+                  <a:srgbClr val="6AA84F"/>
                 </a:solidFill>
               </a:rPr>
               <a:t>10/10</a:t>
@@ -4778,15 +4778,15 @@
           </a:xfrm>
           <a:prstGeom prst="roundRect">
             <a:avLst>
-              <a:gd name="adj" fmla="val 5333"/>
+              <a:gd name="adj" fmla="val 1333"/>
             </a:avLst>
           </a:prstGeom>
           <a:solidFill>
-            <a:srgbClr val="EEF3F7"/>
+            <a:srgbClr val="E4E0D8"/>
           </a:solidFill>
           <a:ln w="12700">
             <a:solidFill>
-              <a:srgbClr val="EEF3F7"/>
+              <a:srgbClr val="E4E0D8"/>
             </a:solidFill>
             <a:prstDash val="solid"/>
           </a:ln>
@@ -4894,7 +4894,7 @@
             <a:lvl1pPr>
               <a:defRPr sz="1000">
                 <a:solidFill>
-                  <a:srgbClr val="94A7B8"/>
+                  <a:srgbClr val="8C887F"/>
                 </a:solidFill>
               </a:defRPr>
             </a:lvl1pPr>
@@ -5013,7 +5013,7 @@
             <a:r>
               <a:rPr lang="en-US" sz="1800" dirty="0">
                 <a:solidFill>
-                  <a:srgbClr val="94A7B8"/>
+                  <a:srgbClr val="8C887F"/>
                 </a:solidFill>
               </a:rPr>
               <a:t>Control theory imported from the West assumes lane discipline. We modelled lane-less traffic from physics, showed the standard method mis-allocates green by 21%, and fixed the equity problem that correction created.</a:t>
@@ -5035,15 +5035,15 @@
           </a:xfrm>
           <a:prstGeom prst="roundRect">
             <a:avLst>
-              <a:gd name="adj" fmla="val 7273"/>
+              <a:gd name="adj" fmla="val 1818"/>
             </a:avLst>
           </a:prstGeom>
           <a:solidFill>
-            <a:srgbClr val="1B2A3A"/>
+            <a:srgbClr val="21222A"/>
           </a:solidFill>
           <a:ln w="12700">
             <a:solidFill>
-              <a:srgbClr val="1B2A3A"/>
+              <a:srgbClr val="21222A"/>
             </a:solidFill>
             <a:prstDash val="solid"/>
           </a:ln>
@@ -5076,7 +5076,7 @@
             <a:r>
               <a:rPr lang="en-US" sz="1400" dirty="0">
                 <a:solidFill>
-                  <a:srgbClr val="FFB347"/>
+                  <a:srgbClr val="E8A33D"/>
                 </a:solidFill>
               </a:rPr>
               <a:t>Rishab CV · 24BCE5296       Martin Wills · 24BCE5255</a:t>
@@ -5098,11 +5098,11 @@
           </a:xfrm>
           <a:prstGeom prst="roundRect">
             <a:avLst>
-              <a:gd name="adj" fmla="val 7813"/>
+              <a:gd name="adj" fmla="val 2604"/>
             </a:avLst>
           </a:prstGeom>
           <a:solidFill>
-            <a:srgbClr val="09111A"/>
+            <a:srgbClr val="111115"/>
           </a:solidFill>
           <a:ln w="12700">
             <a:solidFill>
@@ -5127,11 +5127,11 @@
             <a:avLst/>
           </a:prstGeom>
           <a:solidFill>
-            <a:srgbClr val="1B2730"/>
+            <a:srgbClr val="26262C"/>
           </a:solidFill>
           <a:ln w="12700">
             <a:solidFill>
-              <a:srgbClr val="22303C"/>
+              <a:srgbClr val="2E2E34"/>
             </a:solidFill>
             <a:prstDash val="solid"/>
           </a:ln>
@@ -5152,11 +5152,11 @@
             <a:avLst/>
           </a:prstGeom>
           <a:solidFill>
-            <a:srgbClr val="1B2730"/>
+            <a:srgbClr val="26262C"/>
           </a:solidFill>
           <a:ln w="12700">
             <a:solidFill>
-              <a:srgbClr val="22303C"/>
+              <a:srgbClr val="2E2E34"/>
             </a:solidFill>
             <a:prstDash val="solid"/>
           </a:ln>
@@ -5177,11 +5177,11 @@
             <a:avLst/>
           </a:prstGeom>
           <a:solidFill>
-            <a:srgbClr val="3CE87C"/>
+            <a:srgbClr val="6AA84F"/>
           </a:solidFill>
           <a:ln w="12700">
             <a:solidFill>
-              <a:srgbClr val="3CE87C"/>
+              <a:srgbClr val="6AA84F"/>
             </a:solidFill>
             <a:prstDash val="solid"/>
           </a:ln>
@@ -5212,40 +5212,40 @@
   <a:themeElements>
     <a:clrScheme name="SmartTraffic Signal">
       <a:dk1>
-        <a:srgbClr val="0E1620"/>
+        <a:srgbClr val="16161A"/>
       </a:dk1>
       <a:lt1>
-        <a:srgbClr val="FFFFFF"/>
+        <a:srgbClr val="F2EFE9"/>
       </a:lt1>
       <a:dk2>
-        <a:srgbClr val="1B2A3A"/>
+        <a:srgbClr val="21222A"/>
       </a:dk2>
       <a:lt2>
-        <a:srgbClr val="EEF3F7"/>
+        <a:srgbClr val="E4E0D8"/>
       </a:lt2>
       <a:accent1>
-        <a:srgbClr val="FFB347"/>
+        <a:srgbClr val="E8A33D"/>
       </a:accent1>
       <a:accent2>
-        <a:srgbClr val="3CE87C"/>
+        <a:srgbClr val="6AA84F"/>
       </a:accent2>
       <a:accent3>
-        <a:srgbClr val="FF5A5A"/>
+        <a:srgbClr val="C8503F"/>
       </a:accent3>
       <a:accent4>
-        <a:srgbClr val="8FD8FF"/>
+        <a:srgbClr val="A8A398"/>
       </a:accent4>
       <a:accent5>
-        <a:srgbClr val="94A7B8"/>
+        <a:srgbClr val="8C887F"/>
       </a:accent5>
       <a:accent6>
-        <a:srgbClr val="C9A227"/>
+        <a:srgbClr val="B0883C"/>
       </a:accent6>
       <a:hlink>
-        <a:srgbClr val="8FD8FF"/>
+        <a:srgbClr val="E8A33D"/>
       </a:hlink>
       <a:folHlink>
-        <a:srgbClr val="94A7B8"/>
+        <a:srgbClr val="8C887F"/>
       </a:folHlink>
     </a:clrScheme>
     <a:fontScheme name="SmartTraffic Signal">

--- a/docs/deck/SmartTraffic-5min.pptx
+++ b/docs/deck/SmartTraffic-5min.pptx
@@ -113,7 +113,7 @@
   <p:extLst>
     <p:ext uri="{521415D9-36F7-43E2-AB2F-B90AF26B5E84}">
       <p14:sectionLst xmlns:p14="http://schemas.microsoft.com/office/powerpoint/2010/main">
-        <p14:section name="Deck" id="{790e9daf-7150-ad02-ac18-6fd701d0d273}">
+        <p14:section name="Deck" id="{c590a7aa-ec02-47ac-2d95-b4a93bf40935}">
           <p14:sldIdLst>
             <p14:sldId id="256"/>
             <p14:sldId id="257"/>
@@ -3698,7 +3698,7 @@
         <p:spPr>
           <a:xfrm>
             <a:off x="7863840" y="2560320"/>
-            <a:ext cx="3383280" cy="548640"/>
+            <a:ext cx="3383280" cy="502920"/>
           </a:xfrm>
           <a:prstGeom prst="rect">
             <a:avLst/>
@@ -3733,8 +3733,8 @@
         </p:nvSpPr>
         <p:spPr>
           <a:xfrm>
-            <a:off x="7863840" y="2971800"/>
-            <a:ext cx="3383280" cy="2194560"/>
+            <a:off x="7863840" y="3154680"/>
+            <a:ext cx="3383280" cy="2011680"/>
           </a:xfrm>
           <a:prstGeom prst="rect">
             <a:avLst/>
@@ -3937,7 +3937,7 @@
         <p:spPr>
           <a:xfrm>
             <a:off x="960120" y="1737360"/>
-            <a:ext cx="4572000" cy="685800"/>
+            <a:ext cx="4572000" cy="457200"/>
           </a:xfrm>
           <a:prstGeom prst="rect">
             <a:avLst/>
@@ -4056,7 +4056,7 @@
         <p:spPr>
           <a:xfrm>
             <a:off x="6629400" y="1737360"/>
-            <a:ext cx="4572000" cy="685800"/>
+            <a:ext cx="4572000" cy="457200"/>
           </a:xfrm>
           <a:prstGeom prst="rect">
             <a:avLst/>

--- a/docs/deck/SmartTraffic-5min.pptx
+++ b/docs/deck/SmartTraffic-5min.pptx
@@ -113,7 +113,7 @@
   <p:extLst>
     <p:ext uri="{521415D9-36F7-43E2-AB2F-B90AF26B5E84}">
       <p14:sectionLst xmlns:p14="http://schemas.microsoft.com/office/powerpoint/2010/main">
-        <p14:section name="Deck" id="{c590a7aa-ec02-47ac-2d95-b4a93bf40935}">
+        <p14:section name="Deck" id="{49513ad4-6ade-7156-f77a-07a5c30a721e}">
           <p14:sldIdLst>
             <p14:sldId id="256"/>
             <p14:sldId id="257"/>
@@ -3250,7 +3250,7 @@
                   <a:schemeClr val="bg1"/>
                 </a:solidFill>
               </a:rPr>
-              <a:t>Signal theory assumes lane discipline</a:t>
+              <a:t>Textbooks assume lanes. We have none.</a:t>
             </a:r>
             <a:endParaRPr lang="en-US" sz="3600" dirty="0"/>
           </a:p>
@@ -3313,7 +3313,7 @@
                   <a:srgbClr val="8C887F"/>
                 </a:solidFill>
               </a:rPr>
-              <a:t>What the textbooks assume</a:t>
+              <a:t>What the textbooks say</a:t>
             </a:r>
             <a:endParaRPr lang="en-US" sz="1700" dirty="0"/>
           </a:p>
@@ -3349,7 +3349,7 @@
                   <a:schemeClr val="bg1"/>
                 </a:solidFill>
               </a:rPr>
-              <a:t>Vehicles queue single file. One crosses per lane per headway. A fixed factor converts a bus or a scooter into "car equivalents".</a:t>
+              <a:t>Traffic queues in neat lanes. One vehicle crosses per lane, per gap. A bus and a scooter both get turned into "car equivalents" using a fixed number.</a:t>
             </a:r>
             <a:endParaRPr lang="en-US" sz="1500" dirty="0"/>
           </a:p>
@@ -3412,7 +3412,7 @@
                   <a:srgbClr val="E8A33D"/>
                 </a:solidFill>
               </a:rPr>
-              <a:t>What an Indian junction does</a:t>
+              <a:t>What actually happens here</a:t>
             </a:r>
             <a:endParaRPr lang="en-US" sz="1700" dirty="0"/>
           </a:p>
@@ -3448,7 +3448,7 @@
                   <a:schemeClr val="bg1"/>
                 </a:solidFill>
               </a:rPr>
-              <a:t>Two-wheelers filter into lateral gaps and cross two or three abreast where one car fits. What limits the stop line is lateral space — not a factor calibrated for moving traffic.</a:t>
+              <a:t>Scooters do not wait their turn in a lane. They filter into gaps and cross three abreast where one car fits. So what really limits a junction is how much width a vehicle takes, not a number borrowed from moving traffic.</a:t>
             </a:r>
             <a:endParaRPr lang="en-US" sz="1500" dirty="0"/>
           </a:p>
@@ -3719,7 +3719,7 @@
                   <a:schemeClr val="tx2"/>
                 </a:solidFill>
               </a:rPr>
-              <a:t>of green wasted at Indian traffic mixes</a:t>
+              <a:t>of the green light is wasted</a:t>
             </a:r>
             <a:endParaRPr lang="en-US" sz="1400" dirty="0"/>
           </a:p>
@@ -3755,7 +3755,7 @@
                   <a:schemeClr val="tx2"/>
                 </a:solidFill>
               </a:rPr>
-              <a:t>Held green after the queue has already cleared. Those seconds are taken from the cross street.</a:t>
+              <a:t>The road stays green after its queue has gone. Those seconds come straight out of the cross street.</a:t>
             </a:r>
             <a:endParaRPr lang="en-US" sz="1300" dirty="0"/>
           </a:p>
@@ -3775,7 +3775,7 @@
                   <a:schemeClr val="tx2"/>
                 </a:solidFill>
               </a:rPr>
-              <a:t>Our model reproduces the textbook figure for cars exactly, so it departs from convention only where lane discipline does.</a:t>
+              <a:t>For cars, our model gives exactly the textbook answer. It only disagrees where lane discipline breaks down.</a:t>
             </a:r>
             <a:endParaRPr lang="en-US" sz="1300" dirty="0"/>
           </a:p>
@@ -3958,7 +3958,7 @@
                   <a:srgbClr val="C8503F"/>
                 </a:solidFill>
               </a:rPr>
-              <a:t>Correcting the measure was not enough</a:t>
+              <a:t>Fixing the measurement was not enough</a:t>
             </a:r>
             <a:endParaRPr lang="en-US" sz="1700" dirty="0"/>
           </a:p>
@@ -3994,7 +3994,7 @@
                   <a:schemeClr val="bg1"/>
                 </a:solidFill>
               </a:rPr>
-              <a:t>Optimising green-seconds-per-vehicle treats a scooter road as cheap, so it scored badly on the very thing being maximised.</a:t>
+              <a:t>Measuring green-seconds per vehicle makes a scooter road look cheap, so it scored badly on the very thing we were maximising.</a:t>
             </a:r>
             <a:endParaRPr lang="en-US" sz="1400" dirty="0"/>
           </a:p>
@@ -4014,7 +4014,7 @@
                   <a:schemeClr val="bg1"/>
                 </a:solidFill>
               </a:rPr>
-              <a:t>It starved that road: 184 ticks of waiting — minutes — falling on the riders least able to absorb it.</a:t>
+              <a:t>It left that road red for 184 ticks. Minutes. And the people waiting were the ones who could least afford to.</a:t>
             </a:r>
             <a:endParaRPr lang="en-US" sz="1400" dirty="0"/>
           </a:p>
@@ -4077,7 +4077,7 @@
                   <a:srgbClr val="6AA84F"/>
                 </a:solidFill>
               </a:rPr>
-              <a:t>So we changed what we optimise</a:t>
+              <a:t>So we changed what we aimed at</a:t>
             </a:r>
             <a:endParaRPr lang="en-US" sz="1700" dirty="0"/>
           </a:p>
@@ -4113,7 +4113,7 @@
                   <a:schemeClr val="bg1"/>
                 </a:solidFill>
               </a:rPr>
-              <a:t>Road efficiency is a constraint, not the goal. The controller now scores each road by people moved per second of green, with a fairness term on accumulated red time.</a:t>
+              <a:t>Efficiency is not the goal, it is a limit. We now score each road by how many people it moves per second of green, plus a fairness term for how long it has been kept waiting.</a:t>
             </a:r>
             <a:endParaRPr lang="en-US" sz="1400" dirty="0"/>
           </a:p>
@@ -4133,7 +4133,7 @@
                   <a:schemeClr val="bg1"/>
                 </a:solidFill>
               </a:rPr>
-              <a:t>Worst-case waiting fell from 184 ticks to 37 — a five-fold cut.</a:t>
+              <a:t>The worst wait dropped from 184 ticks to 37.</a:t>
             </a:r>
             <a:endParaRPr lang="en-US" sz="1400" dirty="0"/>
           </a:p>
@@ -4321,7 +4321,7 @@
                   <a:schemeClr val="tx1"/>
                 </a:solidFill>
               </a:rPr>
-              <a:t>+1,911 ± 848 more people moved than what is deployed today — and no road left starving</a:t>
+              <a:t>1,911 more people moved than today’s method (±848), and no road left starving</a:t>
             </a:r>
             <a:endParaRPr lang="en-US" sz="1500" dirty="0"/>
           </a:p>
@@ -4543,7 +4543,7 @@
                   <a:srgbClr val="8C887F"/>
                 </a:solidFill>
               </a:rPr>
-              <a:t>Re-measures every documented claim and exits non-zero if one has stopped being true.</a:t>
+              <a:t>Re-runs every number in our docs. If one stops being true, the build fails.</a:t>
             </a:r>
             <a:endParaRPr lang="en-US" sz="1400" dirty="0"/>
           </a:p>
@@ -4651,7 +4651,7 @@
                   <a:schemeClr val="tx1"/>
                 </a:solidFill>
               </a:rPr>
-              <a:t>122</a:t>
+              <a:t>130</a:t>
             </a:r>
             <a:endParaRPr lang="en-US" sz="4400" dirty="0"/>
           </a:p>
@@ -4723,7 +4723,7 @@
                   <a:schemeClr val="tx1"/>
                 </a:solidFill>
               </a:rPr>
-              <a:t>15</a:t>
+              <a:t>16</a:t>
             </a:r>
             <a:endParaRPr lang="en-US" sz="4400" dirty="0"/>
           </a:p>
@@ -4858,7 +4858,7 @@
                   <a:schemeClr val="tx2"/>
                 </a:solidFill>
               </a:rPr>
-              <a:t>Discharge parameters are estimates, not measurements from a real junction. It moves more people but fewer vehicles, which is a policy choice. And where every road carries the same traffic it is measurably behind the conventional controller.</a:t>
+              <a:t>Our discharge numbers are estimates, not measurements from a real junction. We move more people but fewer vehicles, and which of those a city wants is their call. And when every road carries the same mix, we are actually behind the conventional one.</a:t>
             </a:r>
             <a:endParaRPr lang="en-US" sz="1300" dirty="0"/>
           </a:p>
@@ -5016,7 +5016,7 @@
                   <a:srgbClr val="8C887F"/>
                 </a:solidFill>
               </a:rPr>
-              <a:t>Control theory imported from the West assumes lane discipline. We modelled lane-less traffic from physics, showed the standard method mis-allocates green by 21%, and fixed the equity problem that correction created.</a:t>
+              <a:t>Signal control was designed for traffic that queues in lanes. Ours is not like that. We worked out how Indian traffic really clears a junction, found the standard method wastes a fifth of the green, then fixed the unfairness our own fix introduced.</a:t>
             </a:r>
             <a:endParaRPr lang="en-US" sz="1800" dirty="0"/>
           </a:p>
